--- a/docs/AEGIS-PARTNER-DECK-2026-09-09.pptx
+++ b/docs/AEGIS-PARTNER-DECK-2026-09-09.pptx
@@ -4299,13 +4299,13 @@
             <a:r>
               <a:rPr lang="en-US" sz="1100" b="1" spc="200" kern="0" dirty="0">
                 <a:solidFill>
-                  <a:srgbClr val="9A6700"/>
-                </a:solidFill>
-                <a:latin typeface="Calibri" pitchFamily="34" charset="0"/>
-                <a:ea typeface="Calibri" pitchFamily="34" charset="-122"/>
-                <a:cs typeface="Calibri" pitchFamily="34" charset="-120"/>
-              </a:rPr>
-              <a:t>THE GAP I WOULD FIND FIRST IF I WERE YOU</a:t>
+                  <a:srgbClr val="B3261E"/>
+                </a:solidFill>
+                <a:latin typeface="Calibri" pitchFamily="34" charset="0"/>
+                <a:ea typeface="Calibri" pitchFamily="34" charset="-122"/>
+                <a:cs typeface="Calibri" pitchFamily="34" charset="-120"/>
+              </a:rPr>
+              <a:t>A NUMBER WE GOT WRONG, AND WHAT WE DID ABOUT IT</a:t>
             </a:r>
             <a:endParaRPr lang="en-US" sz="1100" dirty="0"/>
           </a:p>
@@ -4344,7 +4344,7 @@
                 <a:ea typeface="Cambria" pitchFamily="34" charset="-122"/>
                 <a:cs typeface="Cambria" pitchFamily="34" charset="-120"/>
               </a:rPr>
-              <a:t>Audit is strong. Operations is thin. Those are different words.</a:t>
+              <a:t>We said three alarms. It was twenty-two.</a:t>
             </a:r>
             <a:endParaRPr lang="en-US" sz="3400" dirty="0"/>
           </a:p>
@@ -4359,6 +4359,190 @@
         <p:spPr>
           <a:xfrm>
             <a:off x="566928" y="1609344"/>
+            <a:ext cx="5349240" cy="2340864"/>
+          </a:xfrm>
+          <a:prstGeom prst="roundRect">
+            <a:avLst>
+              <a:gd name="adj" fmla="val 3516"/>
+            </a:avLst>
+          </a:prstGeom>
+          <a:solidFill>
+            <a:srgbClr val="FBE9E7"/>
+          </a:solidFill>
+          <a:ln w="12700">
+            <a:solidFill>
+              <a:srgbClr val="F0C4C0"/>
+            </a:solidFill>
+            <a:prstDash val="solid"/>
+          </a:ln>
+        </p:spPr>
+      </p:sp>
+      <p:sp>
+        <p:nvSpPr>
+          <p:cNvPr id="5" name="Text 3"/>
+          <p:cNvSpPr txBox="1"/>
+          <p:nvPr/>
+        </p:nvSpPr>
+        <p:spPr>
+          <a:xfrm>
+            <a:off x="868680" y="1773936"/>
+            <a:ext cx="4754880" cy="329184"/>
+          </a:xfrm>
+          <a:prstGeom prst="rect">
+            <a:avLst/>
+          </a:prstGeom>
+          <a:noFill/>
+          <a:ln/>
+        </p:spPr>
+        <p:txBody>
+          <a:bodyPr wrap="square" lIns="0" tIns="0" rIns="0" bIns="0" rtlCol="0" anchor="ctr"/>
+          <a:lstStyle/>
+          <a:p>
+            <a:pPr indent="0" marL="0">
+              <a:buNone/>
+            </a:pPr>
+            <a:r>
+              <a:rPr lang="en-US" sz="1700" b="1" dirty="0">
+                <a:solidFill>
+                  <a:srgbClr val="B3261E"/>
+                </a:solidFill>
+                <a:latin typeface="Cambria" pitchFamily="34" charset="0"/>
+                <a:ea typeface="Cambria" pitchFamily="34" charset="-122"/>
+                <a:cs typeface="Cambria" pitchFamily="34" charset="-120"/>
+              </a:rPr>
+              <a:t>What we claimed</a:t>
+            </a:r>
+            <a:endParaRPr lang="en-US" sz="1700" dirty="0"/>
+          </a:p>
+        </p:txBody>
+      </p:sp>
+      <p:sp>
+        <p:nvSpPr>
+          <p:cNvPr id="6" name="Text 4"/>
+          <p:cNvSpPr txBox="1"/>
+          <p:nvPr/>
+        </p:nvSpPr>
+        <p:spPr>
+          <a:xfrm>
+            <a:off x="868680" y="2194560"/>
+            <a:ext cx="4754880" cy="1627632"/>
+          </a:xfrm>
+          <a:prstGeom prst="rect">
+            <a:avLst/>
+          </a:prstGeom>
+          <a:noFill/>
+          <a:ln/>
+        </p:spPr>
+        <p:txBody>
+          <a:bodyPr wrap="square" lIns="0" tIns="0" rIns="0" bIns="0" rtlCol="0" anchor="ctr"/>
+          <a:lstStyle/>
+          <a:p>
+            <a:pPr marL="342900" indent="-342900">
+              <a:lnSpc>
+                <a:spcPct val="110000"/>
+              </a:lnSpc>
+              <a:spcAft>
+                <a:spcPts val="800"/>
+              </a:spcAft>
+              <a:buSzPct val="100000"/>
+              <a:buChar char="•"/>
+            </a:pPr>
+            <a:r>
+              <a:rPr lang="en-US" sz="1200" dirty="0">
+                <a:solidFill>
+                  <a:srgbClr val="2C3A4E"/>
+                </a:solidFill>
+                <a:latin typeface="Calibri" pitchFamily="34" charset="0"/>
+                <a:ea typeface="Calibri" pitchFamily="34" charset="-122"/>
+                <a:cs typeface="Calibri" pitchFamily="34" charset="-120"/>
+              </a:rPr>
+              <a:t>"Three alarms. Observability is the thinnest part of the platform."</a:t>
+            </a:r>
+            <a:endParaRPr lang="en-US" sz="1200" dirty="0"/>
+          </a:p>
+          <a:p>
+            <a:pPr marL="342900" indent="-342900">
+              <a:lnSpc>
+                <a:spcPct val="110000"/>
+              </a:lnSpc>
+              <a:spcAft>
+                <a:spcPts val="800"/>
+              </a:spcAft>
+              <a:buSzPct val="100000"/>
+              <a:buChar char="•"/>
+            </a:pPr>
+            <a:r>
+              <a:rPr lang="en-US" sz="1200" dirty="0">
+                <a:solidFill>
+                  <a:srgbClr val="2C3A4E"/>
+                </a:solidFill>
+                <a:latin typeface="Calibri" pitchFamily="34" charset="0"/>
+                <a:ea typeface="Calibri" pitchFamily="34" charset="-122"/>
+                <a:cs typeface="Calibri" pitchFamily="34" charset="-120"/>
+              </a:rPr>
+              <a:t>Counted cw.Alarm( CALL SITES in the source - two are inside loops</a:t>
+            </a:r>
+            <a:endParaRPr lang="en-US" sz="1200" dirty="0"/>
+          </a:p>
+          <a:p>
+            <a:pPr marL="342900" indent="-342900">
+              <a:lnSpc>
+                <a:spcPct val="110000"/>
+              </a:lnSpc>
+              <a:spcAft>
+                <a:spcPts val="800"/>
+              </a:spcAft>
+              <a:buSzPct val="100000"/>
+              <a:buChar char="•"/>
+            </a:pPr>
+            <a:r>
+              <a:rPr lang="en-US" sz="1200" dirty="0">
+                <a:solidFill>
+                  <a:srgbClr val="2C3A4E"/>
+                </a:solidFill>
+                <a:latin typeface="Calibri" pitchFamily="34" charset="0"/>
+                <a:ea typeface="Calibri" pitchFamily="34" charset="-122"/>
+                <a:cs typeface="Calibri" pitchFamily="34" charset="-120"/>
+              </a:rPr>
+              <a:t>Measured the generating code instead of the deployed artifact</a:t>
+            </a:r>
+            <a:endParaRPr lang="en-US" sz="1200" dirty="0"/>
+          </a:p>
+          <a:p>
+            <a:pPr marL="342900" indent="-342900">
+              <a:lnSpc>
+                <a:spcPct val="110000"/>
+              </a:lnSpc>
+              <a:spcAft>
+                <a:spcPts val="800"/>
+              </a:spcAft>
+              <a:buSzPct val="100000"/>
+              <a:buChar char="•"/>
+            </a:pPr>
+            <a:r>
+              <a:rPr lang="en-US" sz="1200" dirty="0">
+                <a:solidFill>
+                  <a:srgbClr val="2C3A4E"/>
+                </a:solidFill>
+                <a:latin typeface="Calibri" pitchFamily="34" charset="0"/>
+                <a:ea typeface="Calibri" pitchFamily="34" charset="-122"/>
+                <a:cs typeface="Calibri" pitchFamily="34" charset="-120"/>
+              </a:rPr>
+              <a:t>Same defect as two entries already in our own register (L60, L67)</a:t>
+            </a:r>
+            <a:endParaRPr lang="en-US" sz="1200" dirty="0"/>
+          </a:p>
+        </p:txBody>
+      </p:sp>
+      <p:sp>
+        <p:nvSpPr>
+          <p:cNvPr id="7" name="Shape 5"/>
+          <p:cNvSpPr/>
+          <p:nvPr/>
+        </p:nvSpPr>
+        <p:spPr>
+          <a:xfrm>
+            <a:off x="6236208" y="1609344"/>
             <a:ext cx="5349240" cy="2340864"/>
           </a:xfrm>
           <a:prstGeom prst="roundRect">
@@ -4379,13 +4563,13 @@
       </p:sp>
       <p:sp>
         <p:nvSpPr>
-          <p:cNvPr id="5" name="Text 3"/>
-          <p:cNvSpPr txBox="1"/>
-          <p:nvPr/>
-        </p:nvSpPr>
-        <p:spPr>
-          <a:xfrm>
-            <a:off x="868680" y="1773936"/>
+          <p:cNvPr id="8" name="Text 6"/>
+          <p:cNvSpPr txBox="1"/>
+          <p:nvPr/>
+        </p:nvSpPr>
+        <p:spPr>
+          <a:xfrm>
+            <a:off x="6537960" y="1773936"/>
             <a:ext cx="4754880" cy="329184"/>
           </a:xfrm>
           <a:prstGeom prst="rect">
@@ -4410,7 +4594,7 @@
                 <a:ea typeface="Cambria" pitchFamily="34" charset="-122"/>
                 <a:cs typeface="Cambria" pitchFamily="34" charset="-120"/>
               </a:rPr>
-              <a:t>Audit — strong</a:t>
+              <a:t>What is actually deployed</a:t>
             </a:r>
             <a:endParaRPr lang="en-US" sz="1700" dirty="0"/>
           </a:p>
@@ -4418,13 +4602,13 @@
       </p:sp>
       <p:sp>
         <p:nvSpPr>
-          <p:cNvPr id="6" name="Text 4"/>
-          <p:cNvSpPr txBox="1"/>
-          <p:nvPr/>
-        </p:nvSpPr>
-        <p:spPr>
-          <a:xfrm>
-            <a:off x="868680" y="2194560"/>
+          <p:cNvPr id="9" name="Text 7"/>
+          <p:cNvSpPr txBox="1"/>
+          <p:nvPr/>
+        </p:nvSpPr>
+        <p:spPr>
+          <a:xfrm>
+            <a:off x="6537960" y="2194560"/>
             <a:ext cx="4754880" cy="1627632"/>
           </a:xfrm>
           <a:prstGeom prst="rect">
@@ -4456,7 +4640,7 @@
                 <a:ea typeface="Calibri" pitchFamily="34" charset="-122"/>
                 <a:cs typeface="Calibri" pitchFamily="34" charset="-120"/>
               </a:rPr>
-              <a:t>Hash-chained, append-only ledger with IAM Deny on update and delete</a:t>
+              <a:t>26 named alarms in 3 severity tiers - P1 page, P2 ticket, P3 advisory</a:t>
             </a:r>
             <a:endParaRPr lang="en-US" sz="1200" dirty="0"/>
           </a:p>
@@ -4480,7 +4664,7 @@
                 <a:ea typeface="Calibri" pitchFamily="34" charset="-122"/>
                 <a:cs typeface="Calibri" pitchFamily="34" charset="-120"/>
               </a:rPr>
-              <a:t>Written before the side effect, carrying the policy version that decided the case</a:t>
+              <a:t>Latency alarmed, not merely charted. Approval backlog: 2h, was 24h</a:t>
             </a:r>
             <a:endParaRPr lang="en-US" sz="1200" dirty="0"/>
           </a:p>
@@ -4504,7 +4688,7 @@
                 <a:ea typeface="Calibri" pitchFamily="34" charset="-122"/>
                 <a:cs typeface="Calibri" pitchFamily="34" charset="-120"/>
               </a:rPr>
-              <a:t>WORM evidence vault; COMPLIANCE mode mechanism proven</a:t>
+              <a:t>Every alarm has a runbook entry, enforced by a test in CI</a:t>
             </a:r>
             <a:endParaRPr lang="en-US" sz="1200" dirty="0"/>
           </a:p>
@@ -4528,191 +4712,7 @@
                 <a:ea typeface="Calibri" pitchFamily="34" charset="-122"/>
                 <a:cs typeface="Calibri" pitchFamily="34" charset="-120"/>
               </a:rPr>
-              <a:t>Account trail with log-file validation, reconciled in both directions</a:t>
-            </a:r>
-            <a:endParaRPr lang="en-US" sz="1200" dirty="0"/>
-          </a:p>
-        </p:txBody>
-      </p:sp>
-      <p:sp>
-        <p:nvSpPr>
-          <p:cNvPr id="7" name="Shape 5"/>
-          <p:cNvSpPr/>
-          <p:nvPr/>
-        </p:nvSpPr>
-        <p:spPr>
-          <a:xfrm>
-            <a:off x="6236208" y="1609344"/>
-            <a:ext cx="5349240" cy="2340864"/>
-          </a:xfrm>
-          <a:prstGeom prst="roundRect">
-            <a:avLst>
-              <a:gd name="adj" fmla="val 3516"/>
-            </a:avLst>
-          </a:prstGeom>
-          <a:solidFill>
-            <a:srgbClr val="FDF3DC"/>
-          </a:solidFill>
-          <a:ln w="12700">
-            <a:solidFill>
-              <a:srgbClr val="E8CFA0"/>
-            </a:solidFill>
-            <a:prstDash val="solid"/>
-          </a:ln>
-        </p:spPr>
-      </p:sp>
-      <p:sp>
-        <p:nvSpPr>
-          <p:cNvPr id="8" name="Text 6"/>
-          <p:cNvSpPr txBox="1"/>
-          <p:nvPr/>
-        </p:nvSpPr>
-        <p:spPr>
-          <a:xfrm>
-            <a:off x="6537960" y="1773936"/>
-            <a:ext cx="4754880" cy="329184"/>
-          </a:xfrm>
-          <a:prstGeom prst="rect">
-            <a:avLst/>
-          </a:prstGeom>
-          <a:noFill/>
-          <a:ln/>
-        </p:spPr>
-        <p:txBody>
-          <a:bodyPr wrap="square" lIns="0" tIns="0" rIns="0" bIns="0" rtlCol="0" anchor="ctr"/>
-          <a:lstStyle/>
-          <a:p>
-            <a:pPr indent="0" marL="0">
-              <a:buNone/>
-            </a:pPr>
-            <a:r>
-              <a:rPr lang="en-US" sz="1700" b="1" dirty="0">
-                <a:solidFill>
-                  <a:srgbClr val="9A6700"/>
-                </a:solidFill>
-                <a:latin typeface="Cambria" pitchFamily="34" charset="0"/>
-                <a:ea typeface="Cambria" pitchFamily="34" charset="-122"/>
-                <a:cs typeface="Cambria" pitchFamily="34" charset="-120"/>
-              </a:rPr>
-              <a:t>Operations — thin</a:t>
-            </a:r>
-            <a:endParaRPr lang="en-US" sz="1700" dirty="0"/>
-          </a:p>
-        </p:txBody>
-      </p:sp>
-      <p:sp>
-        <p:nvSpPr>
-          <p:cNvPr id="9" name="Text 7"/>
-          <p:cNvSpPr txBox="1"/>
-          <p:nvPr/>
-        </p:nvSpPr>
-        <p:spPr>
-          <a:xfrm>
-            <a:off x="6537960" y="2194560"/>
-            <a:ext cx="4754880" cy="1627632"/>
-          </a:xfrm>
-          <a:prstGeom prst="rect">
-            <a:avLst/>
-          </a:prstGeom>
-          <a:noFill/>
-          <a:ln/>
-        </p:spPr>
-        <p:txBody>
-          <a:bodyPr wrap="square" lIns="0" tIns="0" rIns="0" bIns="0" rtlCol="0" anchor="ctr"/>
-          <a:lstStyle/>
-          <a:p>
-            <a:pPr marL="342900" indent="-342900">
-              <a:lnSpc>
-                <a:spcPct val="110000"/>
-              </a:lnSpc>
-              <a:spcAft>
-                <a:spcPts val="800"/>
-              </a:spcAft>
-              <a:buSzPct val="100000"/>
-              <a:buChar char="•"/>
-            </a:pPr>
-            <a:r>
-              <a:rPr lang="en-US" sz="1200" dirty="0">
-                <a:solidFill>
-                  <a:srgbClr val="2C3A4E"/>
-                </a:solidFill>
-                <a:latin typeface="Calibri" pitchFamily="34" charset="0"/>
-                <a:ea typeface="Calibri" pitchFamily="34" charset="-122"/>
-                <a:cs typeface="Calibri" pitchFamily="34" charset="-120"/>
-              </a:rPr>
-              <a:t>One CloudWatch dashboard. Six widgets. Three alarms. One metric filter.</a:t>
-            </a:r>
-            <a:endParaRPr lang="en-US" sz="1200" dirty="0"/>
-          </a:p>
-          <a:p>
-            <a:pPr marL="342900" indent="-342900">
-              <a:lnSpc>
-                <a:spcPct val="110000"/>
-              </a:lnSpc>
-              <a:spcAft>
-                <a:spcPts val="800"/>
-              </a:spcAft>
-              <a:buSzPct val="100000"/>
-              <a:buChar char="•"/>
-            </a:pPr>
-            <a:r>
-              <a:rPr lang="en-US" sz="1200" dirty="0">
-                <a:solidFill>
-                  <a:srgbClr val="2C3A4E"/>
-                </a:solidFill>
-                <a:latin typeface="Calibri" pitchFamily="34" charset="0"/>
-                <a:ea typeface="Calibri" pitchFamily="34" charset="-122"/>
-                <a:cs typeface="Calibri" pitchFamily="34" charset="-120"/>
-              </a:rPr>
-              <a:t>No SLO, no anomaly detection, no per-tenant operational view</a:t>
-            </a:r>
-            <a:endParaRPr lang="en-US" sz="1200" dirty="0"/>
-          </a:p>
-          <a:p>
-            <a:pPr marL="342900" indent="-342900">
-              <a:lnSpc>
-                <a:spcPct val="110000"/>
-              </a:lnSpc>
-              <a:spcAft>
-                <a:spcPts val="800"/>
-              </a:spcAft>
-              <a:buSzPct val="100000"/>
-              <a:buChar char="•"/>
-            </a:pPr>
-            <a:r>
-              <a:rPr lang="en-US" sz="1200" dirty="0">
-                <a:solidFill>
-                  <a:srgbClr val="2C3A4E"/>
-                </a:solidFill>
-                <a:latin typeface="Calibri" pitchFamily="34" charset="0"/>
-                <a:ea typeface="Calibri" pitchFamily="34" charset="-122"/>
-                <a:cs typeface="Calibri" pitchFamily="34" charset="-120"/>
-              </a:rPr>
-              <a:t>No incident-response runbook walkthrough, no DR exercise</a:t>
-            </a:r>
-            <a:endParaRPr lang="en-US" sz="1200" dirty="0"/>
-          </a:p>
-          <a:p>
-            <a:pPr marL="342900" indent="-342900">
-              <a:lnSpc>
-                <a:spcPct val="110000"/>
-              </a:lnSpc>
-              <a:spcAft>
-                <a:spcPts val="800"/>
-              </a:spcAft>
-              <a:buSzPct val="100000"/>
-              <a:buChar char="•"/>
-            </a:pPr>
-            <a:r>
-              <a:rPr lang="en-US" sz="1200" dirty="0">
-                <a:solidFill>
-                  <a:srgbClr val="2C3A4E"/>
-                </a:solidFill>
-                <a:latin typeface="Calibri" pitchFamily="34" charset="0"/>
-                <a:ea typeface="Calibri" pitchFamily="34" charset="-122"/>
-                <a:cs typeface="Calibri" pitchFamily="34" charset="-120"/>
-              </a:rPr>
-              <a:t>On-call is an SNS topic you subscribe at deploy time</a:t>
+              <a:t>Still open: per-tenant dashboards, canary, proof a tier fires live, DR</a:t>
             </a:r>
             <a:endParaRPr lang="en-US" sz="1200" dirty="0"/>
           </a:p>
@@ -4754,7 +4754,7 @@
                 <a:ea typeface="Calibri" pitchFamily="34" charset="-122"/>
                 <a:cs typeface="Calibri" pitchFamily="34" charset="-120"/>
               </a:rPr>
-              <a:t>Why I am putting this in your deck rather than letting them find it. </a:t>
+              <a:t>Why this slide is in the deck at all. </a:t>
             </a:r>
             <a:pPr indent="0" marL="0">
               <a:lnSpc>
@@ -4771,7 +4771,7 @@
                 <a:ea typeface="Calibri" pitchFamily="34" charset="-122"/>
                 <a:cs typeface="Calibri" pitchFamily="34" charset="-120"/>
               </a:rPr>
-              <a:t>“Observability” is in our own pitch, so it is the first thing a partner SA will check — and three alarms is a pilot dashboard, not an operations posture. Saying it first costs nothing. Being caught on it costs the meeting.</a:t>
+              <a:t>A number in our own material was wrong by a factor of seven, in the direction that flattered nobody. How a team handles its own bad number is worth more signal than the number was — and the fix is not "measure more carefully next time", it is a script that reads the CloudFormation template and fails CI when these figures drift from what the brief says.</a:t>
             </a:r>
             <a:endParaRPr lang="en-US" sz="1400" dirty="0"/>
           </a:p>
@@ -4837,7 +4837,7 @@
                 <a:ea typeface="Cambria" pitchFamily="34" charset="-122"/>
                 <a:cs typeface="Cambria" pitchFamily="34" charset="-120"/>
               </a:rPr>
-              <a:t>What it would take to close it</a:t>
+              <a:t>The control that stops it recurring</a:t>
             </a:r>
             <a:endParaRPr lang="en-US" sz="1300" dirty="0"/>
           </a:p>
@@ -4879,7 +4879,7 @@
                 <a:ea typeface="Calibri" pitchFamily="34" charset="-122"/>
                 <a:cs typeface="Calibri" pitchFamily="34" charset="-120"/>
               </a:rPr>
-              <a:t>SLOs on the governed path · per-tenant operational views · alarms on guard-failure and sign-off latency · an incident-response runbook walked end to end · a DR exercise. Days of work, not months — and worth doing before a customer pilot, not before this meeting.</a:t>
+              <a:t>tools/observability_census.py reads the synthesized template and counts what actually deploys. --assert-baseline fails if the numbers drift from what the partner documents quote, so the brief and the infrastructure cannot disagree silently. Ask your SA to run it.</a:t>
             </a:r>
             <a:endParaRPr lang="en-US" sz="1250" dirty="0"/>
           </a:p>
@@ -11762,11 +11762,11 @@
             </a:avLst>
           </a:prstGeom>
           <a:solidFill>
-            <a:srgbClr val="FDF3DC"/>
+            <a:srgbClr val="F1F4F7"/>
           </a:solidFill>
           <a:ln w="12700">
             <a:solidFill>
-              <a:srgbClr val="E8CFA0"/>
+              <a:srgbClr val="E2E8ED"/>
             </a:solidFill>
             <a:prstDash val="solid"/>
           </a:ln>
@@ -11799,7 +11799,7 @@
             <a:r>
               <a:rPr lang="en-US" sz="1500" b="1" dirty="0">
                 <a:solidFill>
-                  <a:srgbClr val="9A6700"/>
+                  <a:srgbClr val="1D6F42"/>
                 </a:solidFill>
                 <a:latin typeface="Cambria" pitchFamily="34" charset="0"/>
                 <a:ea typeface="Cambria" pitchFamily="34" charset="-122"/>
@@ -11883,7 +11883,7 @@
                 <a:ea typeface="Calibri" pitchFamily="34" charset="-122"/>
                 <a:cs typeface="Calibri" pitchFamily="34" charset="-120"/>
               </a:rPr>
-              <a:t>Kill switch, per-tenant budget, Budgets ceiling. Dashboards and alarms are the platform's weakest area.</a:t>
+              <a:t>Kill switch, per-tenant budget, Budgets ceiling. 26 named alarms in 3 severity tiers, each with a runbook entry enforced by CI.</a:t>
             </a:r>
             <a:endParaRPr lang="en-US" sz="1150" dirty="0"/>
           </a:p>
